--- a/docs/presentations/administrator_schedule_creation_workflow.pptx
+++ b/docs/presentations/administrator_schedule_creation_workflow.pptx
@@ -12,6 +12,9 @@
     <p:sldId id="260" r:id="rId6"/>
     <p:sldId id="261" r:id="rId7"/>
     <p:sldId id="262" r:id="rId8"/>
+    <p:sldId id="263" r:id="rId9"/>
+    <p:sldId id="264" r:id="rId10"/>
+    <p:sldId id="265" r:id="rId11"/>
   </p:sldIdLst>
   <p:sldSz cx="12192000" cy="6858000" type="screen16x9"/>
   <p:notesSz cx="6858000" cy="9144000"/>
@@ -48,7 +51,7 @@
       <p:grpSpPr/>
     </p:spTree>
   </p:cSld>
-  <p:clrMap bg1="lt1" tx1="dk1" bg2="lt2" tx2="dk2" accent1="accent1" accent2="accent2" accent3="accent3" accent4="accent4" accent5="accent5" accent6="accent6" hlink="hlink" folHlink="folHlink"/>
+  <p:clrMap bg1="lt1" tx1="dk1" bg2="lt2" accent1="accent1" accent2="accent2" accent3="accent3" accent4="accent4" accent5="accent5" accent6="accent6" hlink="hlink" folHlink="folHlink"/>
   <p:sldLayoutIdLst>
     <p:sldLayoutId id="1" r:id="rId1"/>
   </p:sldLayoutIdLst>
@@ -58,30 +61,70 @@
 
 <file path=ppt/slides/slide1.xml><?xml version="1.0" encoding="utf-8"?>
 <p:sld xmlns:a="http://schemas.openxmlformats.org/drawingml/2006/main" xmlns:r="http://schemas.openxmlformats.org/officeDocument/2006/relationships" xmlns:p="http://schemas.openxmlformats.org/presentationml/2006/main">
-  <p:cSld name="Slide 1">
-    <p:spTree>
-      <p:nvGrpSpPr>
-        <p:cNvPr id="1" name=""/>
-        <p:cNvGrpSpPr/>
-        <p:nvPr/>
-      </p:nvGrpSpPr>
-      <p:grpSpPr/>
-      <p:pic>
-        <p:nvPicPr>
-          <p:cNvPr id="2" name="01-context.png"/>
-          <p:cNvPicPr/>
-          <p:nvPr/>
-        </p:nvPicPr>
-        <p:blipFill>
-          <a:blip r:embed="rId1"/>
-          <a:stretch>
-            <a:fillRect/>
-          </a:stretch>
-        </p:blipFill>
-        <p:spPr>
-          <a:xfrm>
-            <a:off x="1219200" y="0"/>
-            <a:ext cx="9753600" cy="6858000"/>
+  <p:cSld name="Screenshot">
+    <p:spTree>
+      <p:nvGrpSpPr>
+        <p:cNvPr id="1" name=""/>
+        <p:cNvGrpSpPr/>
+        <p:nvPr/>
+      </p:nvGrpSpPr>
+      <p:grpSpPr/>
+      <p:pic>
+        <p:nvPicPr>
+          <p:cNvPr id="2" name="schedule-context-1280.png"/>
+          <p:cNvPicPr/>
+          <p:nvPr/>
+        </p:nvPicPr>
+        <p:blipFill>
+          <a:blip r:embed="rId1"/>
+          <a:stretch>
+            <a:fillRect/>
+          </a:stretch>
+        </p:blipFill>
+        <p:spPr>
+          <a:xfrm>
+            <a:off x="0" y="0"/>
+            <a:ext cx="12192000" cy="6858000"/>
+          </a:xfrm>
+          <a:prstGeom prst="rect">
+            <a:avLst/>
+          </a:prstGeom>
+        </p:spPr>
+      </p:pic>
+    </p:spTree>
+  </p:cSld>
+  <p:clrMapOvr>
+    <a:masterClrMapping/>
+  </p:clrMapOvr>
+</p:sld>
+</file>
+
+<file path=ppt/slides/slide10.xml><?xml version="1.0" encoding="utf-8"?>
+<p:sld xmlns:a="http://schemas.openxmlformats.org/drawingml/2006/main" xmlns:r="http://schemas.openxmlformats.org/officeDocument/2006/relationships" xmlns:p="http://schemas.openxmlformats.org/presentationml/2006/main">
+  <p:cSld name="Screenshot">
+    <p:spTree>
+      <p:nvGrpSpPr>
+        <p:cNvPr id="1" name=""/>
+        <p:cNvGrpSpPr/>
+        <p:nvPr/>
+      </p:nvGrpSpPr>
+      <p:grpSpPr/>
+      <p:pic>
+        <p:nvPicPr>
+          <p:cNvPr id="2" name="user-schedule.png"/>
+          <p:cNvPicPr/>
+          <p:nvPr/>
+        </p:nvPicPr>
+        <p:blipFill>
+          <a:blip r:embed="rId1"/>
+          <a:stretch>
+            <a:fillRect/>
+          </a:stretch>
+        </p:blipFill>
+        <p:spPr>
+          <a:xfrm>
+            <a:off x="0" y="0"/>
+            <a:ext cx="12192000" cy="6858000"/>
           </a:xfrm>
           <a:prstGeom prst="rect">
             <a:avLst/>
@@ -98,30 +141,30 @@
 
 <file path=ppt/slides/slide2.xml><?xml version="1.0" encoding="utf-8"?>
 <p:sld xmlns:a="http://schemas.openxmlformats.org/drawingml/2006/main" xmlns:r="http://schemas.openxmlformats.org/officeDocument/2006/relationships" xmlns:p="http://schemas.openxmlformats.org/presentationml/2006/main">
-  <p:cSld name="Slide 2">
-    <p:spTree>
-      <p:nvGrpSpPr>
-        <p:cNvPr id="1" name=""/>
-        <p:cNvGrpSpPr/>
-        <p:nvPr/>
-      </p:nvGrpSpPr>
-      <p:grpSpPr/>
-      <p:pic>
-        <p:nvPicPr>
-          <p:cNvPr id="2" name="02-place-lesson.png"/>
-          <p:cNvPicPr/>
-          <p:nvPr/>
-        </p:nvPicPr>
-        <p:blipFill>
-          <a:blip r:embed="rId1"/>
-          <a:stretch>
-            <a:fillRect/>
-          </a:stretch>
-        </p:blipFill>
-        <p:spPr>
-          <a:xfrm>
-            <a:off x="2866153" y="0"/>
-            <a:ext cx="6459695" cy="6858000"/>
+  <p:cSld name="Screenshot">
+    <p:spTree>
+      <p:nvGrpSpPr>
+        <p:cNvPr id="1" name=""/>
+        <p:cNvGrpSpPr/>
+        <p:nvPr/>
+      </p:nvGrpSpPr>
+      <p:grpSpPr/>
+      <p:pic>
+        <p:nvPicPr>
+          <p:cNvPr id="2" name="teachers-1280.png"/>
+          <p:cNvPicPr/>
+          <p:nvPr/>
+        </p:nvPicPr>
+        <p:blipFill>
+          <a:blip r:embed="rId1"/>
+          <a:stretch>
+            <a:fillRect/>
+          </a:stretch>
+        </p:blipFill>
+        <p:spPr>
+          <a:xfrm>
+            <a:off x="0" y="0"/>
+            <a:ext cx="12192000" cy="6858000"/>
           </a:xfrm>
           <a:prstGeom prst="rect">
             <a:avLst/>
@@ -138,30 +181,30 @@
 
 <file path=ppt/slides/slide3.xml><?xml version="1.0" encoding="utf-8"?>
 <p:sld xmlns:a="http://schemas.openxmlformats.org/drawingml/2006/main" xmlns:r="http://schemas.openxmlformats.org/officeDocument/2006/relationships" xmlns:p="http://schemas.openxmlformats.org/presentationml/2006/main">
-  <p:cSld name="Slide 3">
-    <p:spTree>
-      <p:nvGrpSpPr>
-        <p:cNvPr id="1" name=""/>
-        <p:cNvGrpSpPr/>
-        <p:nvPr/>
-      </p:nvGrpSpPr>
-      <p:grpSpPr/>
-      <p:pic>
-        <p:nvPicPr>
-          <p:cNvPr id="2" name="03-manual-workload.png"/>
-          <p:cNvPicPr/>
-          <p:nvPr/>
-        </p:nvPicPr>
-        <p:blipFill>
-          <a:blip r:embed="rId1"/>
-          <a:stretch>
-            <a:fillRect/>
-          </a:stretch>
-        </p:blipFill>
-        <p:spPr>
-          <a:xfrm>
-            <a:off x="1219200" y="0"/>
-            <a:ext cx="9753600" cy="6858000"/>
+  <p:cSld name="Screenshot">
+    <p:spTree>
+      <p:nvGrpSpPr>
+        <p:cNvPr id="1" name=""/>
+        <p:cNvGrpSpPr/>
+        <p:nvPr/>
+      </p:nvGrpSpPr>
+      <p:grpSpPr/>
+      <p:pic>
+        <p:nvPicPr>
+          <p:cNvPr id="2" name="workload-1280.png"/>
+          <p:cNvPicPr/>
+          <p:nvPr/>
+        </p:nvPicPr>
+        <p:blipFill>
+          <a:blip r:embed="rId1"/>
+          <a:stretch>
+            <a:fillRect/>
+          </a:stretch>
+        </p:blipFill>
+        <p:spPr>
+          <a:xfrm>
+            <a:off x="0" y="0"/>
+            <a:ext cx="12192000" cy="6858000"/>
           </a:xfrm>
           <a:prstGeom prst="rect">
             <a:avLst/>
@@ -178,30 +221,30 @@
 
 <file path=ppt/slides/slide4.xml><?xml version="1.0" encoding="utf-8"?>
 <p:sld xmlns:a="http://schemas.openxmlformats.org/drawingml/2006/main" xmlns:r="http://schemas.openxmlformats.org/officeDocument/2006/relationships" xmlns:p="http://schemas.openxmlformats.org/presentationml/2006/main">
-  <p:cSld name="Slide 4">
-    <p:spTree>
-      <p:nvGrpSpPr>
-        <p:cNvPr id="1" name=""/>
-        <p:cNvGrpSpPr/>
-        <p:nvPr/>
-      </p:nvGrpSpPr>
-      <p:grpSpPr/>
-      <p:pic>
-        <p:nvPicPr>
-          <p:cNvPr id="2" name="04-edit-workload.png"/>
-          <p:cNvPicPr/>
-          <p:nvPr/>
-        </p:nvPicPr>
-        <p:blipFill>
-          <a:blip r:embed="rId1"/>
-          <a:stretch>
-            <a:fillRect/>
-          </a:stretch>
-        </p:blipFill>
-        <p:spPr>
-          <a:xfrm>
-            <a:off x="1219200" y="0"/>
-            <a:ext cx="9753600" cy="6858000"/>
+  <p:cSld name="Screenshot">
+    <p:spTree>
+      <p:nvGrpSpPr>
+        <p:cNvPr id="1" name=""/>
+        <p:cNvGrpSpPr/>
+        <p:nvPr/>
+      </p:nvGrpSpPr>
+      <p:grpSpPr/>
+      <p:pic>
+        <p:nvPicPr>
+          <p:cNvPr id="2" name="workload-editor-1280.png"/>
+          <p:cNvPicPr/>
+          <p:nvPr/>
+        </p:nvPicPr>
+        <p:blipFill>
+          <a:blip r:embed="rId1"/>
+          <a:stretch>
+            <a:fillRect/>
+          </a:stretch>
+        </p:blipFill>
+        <p:spPr>
+          <a:xfrm>
+            <a:off x="0" y="0"/>
+            <a:ext cx="12192000" cy="6858000"/>
           </a:xfrm>
           <a:prstGeom prst="rect">
             <a:avLst/>
@@ -218,30 +261,30 @@
 
 <file path=ppt/slides/slide5.xml><?xml version="1.0" encoding="utf-8"?>
 <p:sld xmlns:a="http://schemas.openxmlformats.org/drawingml/2006/main" xmlns:r="http://schemas.openxmlformats.org/officeDocument/2006/relationships" xmlns:p="http://schemas.openxmlformats.org/presentationml/2006/main">
-  <p:cSld name="Slide 5">
-    <p:spTree>
-      <p:nvGrpSpPr>
-        <p:cNvPr id="1" name=""/>
-        <p:cNvGrpSpPr/>
-        <p:nvPr/>
-      </p:nvGrpSpPr>
-      <p:grpSpPr/>
-      <p:pic>
-        <p:nvPicPr>
-          <p:cNvPr id="2" name="05-teacher-assignment.png"/>
-          <p:cNvPicPr/>
-          <p:nvPr/>
-        </p:nvPicPr>
-        <p:blipFill>
-          <a:blip r:embed="rId1"/>
-          <a:stretch>
-            <a:fillRect/>
-          </a:stretch>
-        </p:blipFill>
-        <p:spPr>
-          <a:xfrm>
-            <a:off x="1219200" y="0"/>
-            <a:ext cx="9753600" cy="6858000"/>
+  <p:cSld name="Screenshot">
+    <p:spTree>
+      <p:nvGrpSpPr>
+        <p:cNvPr id="1" name=""/>
+        <p:cNvGrpSpPr/>
+        <p:nvPr/>
+      </p:nvGrpSpPr>
+      <p:grpSpPr/>
+      <p:pic>
+        <p:nvPicPr>
+          <p:cNvPr id="2" name="schedule-grid-1280.png"/>
+          <p:cNvPicPr/>
+          <p:nvPr/>
+        </p:nvPicPr>
+        <p:blipFill>
+          <a:blip r:embed="rId1"/>
+          <a:stretch>
+            <a:fillRect/>
+          </a:stretch>
+        </p:blipFill>
+        <p:spPr>
+          <a:xfrm>
+            <a:off x="0" y="0"/>
+            <a:ext cx="12192000" cy="6858000"/>
           </a:xfrm>
           <a:prstGeom prst="rect">
             <a:avLst/>
@@ -258,30 +301,30 @@
 
 <file path=ppt/slides/slide6.xml><?xml version="1.0" encoding="utf-8"?>
 <p:sld xmlns:a="http://schemas.openxmlformats.org/drawingml/2006/main" xmlns:r="http://schemas.openxmlformats.org/officeDocument/2006/relationships" xmlns:p="http://schemas.openxmlformats.org/presentationml/2006/main">
-  <p:cSld name="Slide 6">
-    <p:spTree>
-      <p:nvGrpSpPr>
-        <p:cNvPr id="1" name=""/>
-        <p:cNvGrpSpPr/>
-        <p:nvPr/>
-      </p:nvGrpSpPr>
-      <p:grpSpPr/>
-      <p:pic>
-        <p:nvPicPr>
-          <p:cNvPr id="2" name="06-weekday-transfers.png"/>
-          <p:cNvPicPr/>
-          <p:nvPr/>
-        </p:nvPicPr>
-        <p:blipFill>
-          <a:blip r:embed="rId1"/>
-          <a:stretch>
-            <a:fillRect/>
-          </a:stretch>
-        </p:blipFill>
-        <p:spPr>
-          <a:xfrm>
-            <a:off x="1219200" y="0"/>
-            <a:ext cx="9753600" cy="6858000"/>
+  <p:cSld name="Screenshot">
+    <p:spTree>
+      <p:nvGrpSpPr>
+        <p:cNvPr id="1" name=""/>
+        <p:cNvGrpSpPr/>
+        <p:nvPr/>
+      </p:nvGrpSpPr>
+      <p:grpSpPr/>
+      <p:pic>
+        <p:nvPicPr>
+          <p:cNvPr id="2" name="weekday-transfers-1280.png"/>
+          <p:cNvPicPr/>
+          <p:nvPr/>
+        </p:nvPicPr>
+        <p:blipFill>
+          <a:blip r:embed="rId1"/>
+          <a:stretch>
+            <a:fillRect/>
+          </a:stretch>
+        </p:blipFill>
+        <p:spPr>
+          <a:xfrm>
+            <a:off x="0" y="0"/>
+            <a:ext cx="12192000" cy="6858000"/>
           </a:xfrm>
           <a:prstGeom prst="rect">
             <a:avLst/>
@@ -298,30 +341,110 @@
 
 <file path=ppt/slides/slide7.xml><?xml version="1.0" encoding="utf-8"?>
 <p:sld xmlns:a="http://schemas.openxmlformats.org/drawingml/2006/main" xmlns:r="http://schemas.openxmlformats.org/officeDocument/2006/relationships" xmlns:p="http://schemas.openxmlformats.org/presentationml/2006/main">
-  <p:cSld name="Slide 7">
-    <p:spTree>
-      <p:nvGrpSpPr>
-        <p:cNvPr id="1" name=""/>
-        <p:cNvGrpSpPr/>
-        <p:nvPr/>
-      </p:nvGrpSpPr>
-      <p:grpSpPr/>
-      <p:pic>
-        <p:nvPicPr>
-          <p:cNvPr id="2" name="07-excel-import-entry.png"/>
-          <p:cNvPicPr/>
-          <p:nvPr/>
-        </p:nvPicPr>
-        <p:blipFill>
-          <a:blip r:embed="rId1"/>
-          <a:stretch>
-            <a:fillRect/>
-          </a:stretch>
-        </p:blipFill>
-        <p:spPr>
-          <a:xfrm>
-            <a:off x="0" y="385463"/>
-            <a:ext cx="12192000" cy="6087075"/>
+  <p:cSld name="Screenshot">
+    <p:spTree>
+      <p:nvGrpSpPr>
+        <p:cNvPr id="1" name=""/>
+        <p:cNvGrpSpPr/>
+        <p:nvPr/>
+      </p:nvGrpSpPr>
+      <p:grpSpPr/>
+      <p:pic>
+        <p:nvPicPr>
+          <p:cNvPr id="2" name="reservations-1280.png"/>
+          <p:cNvPicPr/>
+          <p:nvPr/>
+        </p:nvPicPr>
+        <p:blipFill>
+          <a:blip r:embed="rId1"/>
+          <a:stretch>
+            <a:fillRect/>
+          </a:stretch>
+        </p:blipFill>
+        <p:spPr>
+          <a:xfrm>
+            <a:off x="0" y="0"/>
+            <a:ext cx="12192000" cy="6858000"/>
+          </a:xfrm>
+          <a:prstGeom prst="rect">
+            <a:avLst/>
+          </a:prstGeom>
+        </p:spPr>
+      </p:pic>
+    </p:spTree>
+  </p:cSld>
+  <p:clrMapOvr>
+    <a:masterClrMapping/>
+  </p:clrMapOvr>
+</p:sld>
+</file>
+
+<file path=ppt/slides/slide8.xml><?xml version="1.0" encoding="utf-8"?>
+<p:sld xmlns:a="http://schemas.openxmlformats.org/drawingml/2006/main" xmlns:r="http://schemas.openxmlformats.org/officeDocument/2006/relationships" xmlns:p="http://schemas.openxmlformats.org/presentationml/2006/main">
+  <p:cSld name="Screenshot">
+    <p:spTree>
+      <p:nvGrpSpPr>
+        <p:cNvPr id="1" name=""/>
+        <p:cNvGrpSpPr/>
+        <p:nvPr/>
+      </p:nvGrpSpPr>
+      <p:grpSpPr/>
+      <p:pic>
+        <p:nvPicPr>
+          <p:cNvPr id="2" name="excel-import-entry.png"/>
+          <p:cNvPicPr/>
+          <p:nvPr/>
+        </p:nvPicPr>
+        <p:blipFill>
+          <a:blip r:embed="rId1"/>
+          <a:stretch>
+            <a:fillRect/>
+          </a:stretch>
+        </p:blipFill>
+        <p:spPr>
+          <a:xfrm>
+            <a:off x="0" y="0"/>
+            <a:ext cx="12192000" cy="6858000"/>
+          </a:xfrm>
+          <a:prstGeom prst="rect">
+            <a:avLst/>
+          </a:prstGeom>
+        </p:spPr>
+      </p:pic>
+    </p:spTree>
+  </p:cSld>
+  <p:clrMapOvr>
+    <a:masterClrMapping/>
+  </p:clrMapOvr>
+</p:sld>
+</file>
+
+<file path=ppt/slides/slide9.xml><?xml version="1.0" encoding="utf-8"?>
+<p:sld xmlns:a="http://schemas.openxmlformats.org/drawingml/2006/main" xmlns:r="http://schemas.openxmlformats.org/officeDocument/2006/relationships" xmlns:p="http://schemas.openxmlformats.org/presentationml/2006/main">
+  <p:cSld name="Screenshot">
+    <p:spTree>
+      <p:nvGrpSpPr>
+        <p:cNvPr id="1" name=""/>
+        <p:cNvGrpSpPr/>
+        <p:nvPr/>
+      </p:nvGrpSpPr>
+      <p:grpSpPr/>
+      <p:pic>
+        <p:nvPicPr>
+          <p:cNvPr id="2" name="notice-1280.png"/>
+          <p:cNvPicPr/>
+          <p:nvPr/>
+        </p:nvPicPr>
+        <p:blipFill>
+          <a:blip r:embed="rId1"/>
+          <a:stretch>
+            <a:fillRect/>
+          </a:stretch>
+        </p:blipFill>
+        <p:spPr>
+          <a:xfrm>
+            <a:off x="0" y="0"/>
+            <a:ext cx="12192000" cy="6858000"/>
           </a:xfrm>
           <a:prstGeom prst="rect">
             <a:avLst/>
@@ -337,9 +460,9 @@
 </file>
 
 <file path=ppt/theme/theme1.xml><?xml version="1.0" encoding="utf-8"?>
-<a:theme xmlns:a="http://schemas.openxmlformats.org/drawingml/2006/main" name="Default">
+<a:theme xmlns:a="http://schemas.openxmlformats.org/drawingml/2006/main" name="Milk Schedule">
   <a:themeElements>
-    <a:clrScheme name="Default">
+    <a:clrScheme name="Office">
       <a:dk1>
         <a:sysClr val="windowText" lastClr="000000"/>
       </a:dk1>
@@ -347,37 +470,37 @@
         <a:sysClr val="window" lastClr="FFFFFF"/>
       </a:lt1>
       <a:dk2>
-        <a:srgbClr val="000000"/>
+        <a:srgbClr val="1F1F1F"/>
       </a:dk2>
       <a:lt2>
-        <a:srgbClr val="FFFFFF"/>
+        <a:srgbClr val="F2F2F2"/>
       </a:lt2>
       <a:accent1>
-        <a:srgbClr val="6B2337"/>
+        <a:srgbClr val="5A2634"/>
       </a:accent1>
       <a:accent2>
-        <a:srgbClr val="DDE9B1"/>
+        <a:srgbClr val="DCE9B4"/>
       </a:accent2>
       <a:accent3>
-        <a:srgbClr val="999999"/>
+        <a:srgbClr val="B69A7E"/>
       </a:accent3>
       <a:accent4>
-        <a:srgbClr val="333333"/>
+        <a:srgbClr val="7F7F7F"/>
       </a:accent4>
       <a:accent5>
-        <a:srgbClr val="666666"/>
+        <a:srgbClr val="C0504D"/>
       </a:accent5>
       <a:accent6>
-        <a:srgbClr val="CCCCCC"/>
+        <a:srgbClr val="9BBB59"/>
       </a:accent6>
       <a:hlink>
-        <a:srgbClr val="0563C1"/>
+        <a:srgbClr val="0000FF"/>
       </a:hlink>
       <a:folHlink>
-        <a:srgbClr val="954F72"/>
+        <a:srgbClr val="800080"/>
       </a:folHlink>
     </a:clrScheme>
-    <a:fontScheme name="Default">
+    <a:fontScheme name="Office">
       <a:majorFont>
         <a:latin typeface="Arial"/>
       </a:majorFont>
@@ -385,7 +508,7 @@
         <a:latin typeface="Arial"/>
       </a:minorFont>
     </a:fontScheme>
-    <a:fmtScheme name="Default">
+    <a:fmtScheme name="Office">
       <a:fillStyleLst/>
       <a:lnStyleLst/>
       <a:effectStyleLst/>
